--- a/TLCN.pptx
+++ b/TLCN.pptx
@@ -282,6 +282,11 @@
       </a:defRPr>
     </a:lvl9pPr>
   </p:defaultTextStyle>
+  <p:extLst>
+    <p:ext uri="{EFAFB233-063F-42B5-8137-9DF3F51BA10A}">
+      <p15:sldGuideLst xmlns:p15="http://schemas.microsoft.com/office/powerpoint/2012/main"/>
+    </p:ext>
+  </p:extLst>
 </p:presentation>
 </file>
 
@@ -20671,7 +20676,7 @@
         <p:spPr>
           <a:xfrm>
             <a:off x="1422400" y="805372"/>
-            <a:ext cx="6746240" cy="2227726"/>
+            <a:ext cx="6746240" cy="1904560"/>
           </a:xfrm>
           <a:prstGeom prst="rect">
             <a:avLst/>
@@ -20699,26 +20704,6 @@
                 <a:cs typeface="Open Sans" panose="020B0606030504020204" pitchFamily="34" charset="0"/>
               </a:rPr>
               <a:t>🎯 Chức năng</a:t>
-            </a:r>
-          </a:p>
-          <a:p>
-            <a:pPr>
-              <a:lnSpc>
-                <a:spcPct val="150000"/>
-              </a:lnSpc>
-              <a:buFont typeface="Arial" panose="020B0604020202020204" pitchFamily="34" charset="0"/>
-              <a:buChar char="•"/>
-            </a:pPr>
-            <a:r>
-              <a:rPr lang="vi-VN" dirty="0">
-                <a:solidFill>
-                  <a:schemeClr val="tx2"/>
-                </a:solidFill>
-                <a:latin typeface="Open Sans" panose="020B0606030504020204" pitchFamily="34" charset="0"/>
-                <a:ea typeface="Open Sans" panose="020B0606030504020204" pitchFamily="34" charset="0"/>
-                <a:cs typeface="Open Sans" panose="020B0606030504020204" pitchFamily="34" charset="0"/>
-              </a:rPr>
-              <a:t>Chức năng chatting vẫn chưa được hoàn thiện</a:t>
             </a:r>
           </a:p>
           <a:p>
@@ -23355,8 +23340,8 @@
         </p:nvSpPr>
         <p:spPr>
           <a:xfrm>
-            <a:off x="975360" y="1156396"/>
-            <a:ext cx="8422640" cy="2966389"/>
+            <a:off x="975360" y="1405247"/>
+            <a:ext cx="8422640" cy="2535502"/>
           </a:xfrm>
           <a:prstGeom prst="rect">
             <a:avLst/>
@@ -23368,26 +23353,6 @@
             <a:spAutoFit/>
           </a:bodyPr>
           <a:lstStyle/>
-          <a:p>
-            <a:pPr marL="342900" indent="-342900">
-              <a:lnSpc>
-                <a:spcPct val="200000"/>
-              </a:lnSpc>
-              <a:buFont typeface="+mj-lt"/>
-              <a:buAutoNum type="arabicPeriod"/>
-            </a:pPr>
-            <a:r>
-              <a:rPr lang="vi-VN" b="1" dirty="0">
-                <a:solidFill>
-                  <a:schemeClr val="tx2"/>
-                </a:solidFill>
-                <a:latin typeface="Open Sans" panose="020B0606030504020204" pitchFamily="34" charset="0"/>
-                <a:ea typeface="Open Sans" panose="020B0606030504020204" pitchFamily="34" charset="0"/>
-                <a:cs typeface="Open Sans" panose="020B0606030504020204" pitchFamily="34" charset="0"/>
-              </a:rPr>
-              <a:t>Hoàn thiện chức năng chat giữa admin và khách hàng</a:t>
-            </a:r>
-          </a:p>
           <a:p>
             <a:pPr marL="342900" indent="-342900">
               <a:lnSpc>

--- a/TLCN.pptx
+++ b/TLCN.pptx
@@ -35226,10 +35226,10 @@
       </p:sp>
       <p:pic>
         <p:nvPicPr>
-          <p:cNvPr id="3" name="Picture 2" descr="A diagram of a computer&#10;&#10;AI-generated content may be incorrect.">
+          <p:cNvPr id="6" name="Picture 5" descr="A diagram of text and arrows">
             <a:extLst>
               <a:ext uri="{FF2B5EF4-FFF2-40B4-BE49-F238E27FC236}">
-                <a16:creationId xmlns:a16="http://schemas.microsoft.com/office/drawing/2014/main" id="{B486CBF0-D1DF-08CE-2EB3-5886B47A7EA1}"/>
+                <a16:creationId xmlns:a16="http://schemas.microsoft.com/office/drawing/2014/main" id="{CD1984FD-52A7-1FB5-59A3-BF7FA710EA41}"/>
               </a:ext>
             </a:extLst>
           </p:cNvPr>
@@ -35246,8 +35246,8 @@
         </p:blipFill>
         <p:spPr>
           <a:xfrm>
-            <a:off x="3327620" y="0"/>
-            <a:ext cx="4154999" cy="5143500"/>
+            <a:off x="3596640" y="0"/>
+            <a:ext cx="4175759" cy="5143500"/>
           </a:xfrm>
           <a:prstGeom prst="rect">
             <a:avLst/>
